--- a/file_system/file_systems.pptx
+++ b/file_system/file_systems.pptx
@@ -6086,6 +6086,98 @@
   <p:cSld>
     <p:spTree>
       <p:nvGrpSpPr>
+        <p:cNvPr id="1" name=""/>
+        <p:cNvGrpSpPr/>
+        <p:nvPr/>
+      </p:nvGrpSpPr>
+      <p:grpSpPr>
+        <a:xfrm>
+          <a:off x="0" y="0"/>
+          <a:ext cx="0" cy="0"/>
+          <a:chOff x="0" y="0"/>
+          <a:chExt cx="0" cy="0"/>
+        </a:xfrm>
+      </p:grpSpPr>
+      <p:sp>
+        <p:nvSpPr>
+          <p:cNvPr id="2" name="Slide Image Placeholder 1"/>
+          <p:cNvSpPr>
+            <a:spLocks noGrp="1" noRot="1" noChangeAspect="1"/>
+          </p:cNvSpPr>
+          <p:nvPr>
+            <p:ph type="sldImg"/>
+          </p:nvPr>
+        </p:nvSpPr>
+        <p:spPr/>
+      </p:sp>
+      <p:sp>
+        <p:nvSpPr>
+          <p:cNvPr id="3" name="Notes Placeholder 2"/>
+          <p:cNvSpPr>
+            <a:spLocks noGrp="1"/>
+          </p:cNvSpPr>
+          <p:nvPr>
+            <p:ph type="body" idx="1"/>
+          </p:nvPr>
+        </p:nvSpPr>
+        <p:spPr/>
+        <p:txBody>
+          <a:bodyPr/>
+          <a:lstStyle/>
+          <a:p>
+            <a:r>
+              <a:rPr lang="en-US" dirty="0"/>
+              <a:t>The benefit is that a data block no longer needs to reserve part of itself for a pointer to the next block. Therefore, the full capacity of each allocated data block is available for file contents. </a:t>
+            </a:r>
+            <a:r>
+              <a:rPr lang="en-US"/>
+              <a:t>This does not mean that 100% of the disk contains file data: the FAT itself, directories, and other file-system metadata consume space; free blocks contain no file data; and the last block of a file may be only partially filled.</a:t>
+            </a:r>
+          </a:p>
+        </p:txBody>
+      </p:sp>
+      <p:sp>
+        <p:nvSpPr>
+          <p:cNvPr id="4" name="Slide Number Placeholder 3"/>
+          <p:cNvSpPr>
+            <a:spLocks noGrp="1"/>
+          </p:cNvSpPr>
+          <p:nvPr>
+            <p:ph type="sldNum" sz="quarter" idx="5"/>
+          </p:nvPr>
+        </p:nvSpPr>
+        <p:spPr/>
+        <p:txBody>
+          <a:bodyPr/>
+          <a:lstStyle/>
+          <a:p>
+            <a:fld id="{CAE0ABF5-7690-4623-B971-046A51D617CD}" type="slidenum">
+              <a:rPr lang="en-US" altLang="en-US" smtClean="0"/>
+              <a:pPr/>
+              <a:t>44</a:t>
+            </a:fld>
+            <a:endParaRPr lang="en-US" altLang="en-US"/>
+          </a:p>
+        </p:txBody>
+      </p:sp>
+    </p:spTree>
+    <p:extLst>
+      <p:ext uri="{BB962C8B-B14F-4D97-AF65-F5344CB8AC3E}">
+        <p14:creationId xmlns:p14="http://schemas.microsoft.com/office/powerpoint/2010/main" val="1165923282"/>
+      </p:ext>
+    </p:extLst>
+  </p:cSld>
+  <p:clrMapOvr>
+    <a:masterClrMapping/>
+  </p:clrMapOvr>
+</p:notes>
+</file>
+
+<file path=ppt/notesSlides/notesSlide39.xml><?xml version="1.0" encoding="utf-8"?>
+<p:notes xmlns:a="http://schemas.openxmlformats.org/drawingml/2006/main" xmlns:r="http://schemas.openxmlformats.org/officeDocument/2006/relationships" xmlns:p="http://schemas.openxmlformats.org/presentationml/2006/main">
+  <p:cSld>
+    <p:spTree>
+      <p:nvGrpSpPr>
         <p:cNvPr id="1" name="">
           <a:extLst>
             <a:ext uri="{FF2B5EF4-FFF2-40B4-BE49-F238E27FC236}">
@@ -6181,115 +6273,6 @@
     <p:extLst>
       <p:ext uri="{BB962C8B-B14F-4D97-AF65-F5344CB8AC3E}">
         <p14:creationId xmlns:p14="http://schemas.microsoft.com/office/powerpoint/2010/main" val="70869957"/>
-      </p:ext>
-    </p:extLst>
-  </p:cSld>
-  <p:clrMapOvr>
-    <a:masterClrMapping/>
-  </p:clrMapOvr>
-</p:notes>
-</file>
-
-<file path=ppt/notesSlides/notesSlide39.xml><?xml version="1.0" encoding="utf-8"?>
-<p:notes xmlns:a="http://schemas.openxmlformats.org/drawingml/2006/main" xmlns:r="http://schemas.openxmlformats.org/officeDocument/2006/relationships" xmlns:p="http://schemas.openxmlformats.org/presentationml/2006/main">
-  <p:cSld>
-    <p:spTree>
-      <p:nvGrpSpPr>
-        <p:cNvPr id="1" name="">
-          <a:extLst>
-            <a:ext uri="{FF2B5EF4-FFF2-40B4-BE49-F238E27FC236}">
-              <a16:creationId xmlns:a16="http://schemas.microsoft.com/office/drawing/2014/main" id="{A87EB321-74FE-9E72-D51E-5358A3934DB4}"/>
-            </a:ext>
-          </a:extLst>
-        </p:cNvPr>
-        <p:cNvGrpSpPr/>
-        <p:nvPr/>
-      </p:nvGrpSpPr>
-      <p:grpSpPr>
-        <a:xfrm>
-          <a:off x="0" y="0"/>
-          <a:ext cx="0" cy="0"/>
-          <a:chOff x="0" y="0"/>
-          <a:chExt cx="0" cy="0"/>
-        </a:xfrm>
-      </p:grpSpPr>
-      <p:sp>
-        <p:nvSpPr>
-          <p:cNvPr id="2" name="Slide Image Placeholder 1">
-            <a:extLst>
-              <a:ext uri="{FF2B5EF4-FFF2-40B4-BE49-F238E27FC236}">
-                <a16:creationId xmlns:a16="http://schemas.microsoft.com/office/drawing/2014/main" id="{8E925B51-75B8-2647-45E9-940702565B1F}"/>
-              </a:ext>
-            </a:extLst>
-          </p:cNvPr>
-          <p:cNvSpPr>
-            <a:spLocks noGrp="1" noRot="1" noChangeAspect="1"/>
-          </p:cNvSpPr>
-          <p:nvPr>
-            <p:ph type="sldImg"/>
-          </p:nvPr>
-        </p:nvSpPr>
-        <p:spPr/>
-      </p:sp>
-      <p:sp>
-        <p:nvSpPr>
-          <p:cNvPr id="3" name="Notes Placeholder 2">
-            <a:extLst>
-              <a:ext uri="{FF2B5EF4-FFF2-40B4-BE49-F238E27FC236}">
-                <a16:creationId xmlns:a16="http://schemas.microsoft.com/office/drawing/2014/main" id="{BDDA2DCF-5847-56E6-95ED-433E0FA2FB28}"/>
-              </a:ext>
-            </a:extLst>
-          </p:cNvPr>
-          <p:cNvSpPr>
-            <a:spLocks noGrp="1"/>
-          </p:cNvSpPr>
-          <p:nvPr>
-            <p:ph type="body" idx="1"/>
-          </p:nvPr>
-        </p:nvSpPr>
-        <p:spPr/>
-        <p:txBody>
-          <a:bodyPr/>
-          <a:lstStyle/>
-          <a:p>
-            <a:endParaRPr lang="en-US" dirty="0"/>
-          </a:p>
-        </p:txBody>
-      </p:sp>
-      <p:sp>
-        <p:nvSpPr>
-          <p:cNvPr id="4" name="Slide Number Placeholder 3">
-            <a:extLst>
-              <a:ext uri="{FF2B5EF4-FFF2-40B4-BE49-F238E27FC236}">
-                <a16:creationId xmlns:a16="http://schemas.microsoft.com/office/drawing/2014/main" id="{6DDB16CC-D103-7938-581D-808CF59C9943}"/>
-              </a:ext>
-            </a:extLst>
-          </p:cNvPr>
-          <p:cNvSpPr>
-            <a:spLocks noGrp="1"/>
-          </p:cNvSpPr>
-          <p:nvPr>
-            <p:ph type="sldNum" sz="quarter" idx="10"/>
-          </p:nvPr>
-        </p:nvSpPr>
-        <p:spPr/>
-        <p:txBody>
-          <a:bodyPr/>
-          <a:lstStyle/>
-          <a:p>
-            <a:fld id="{CAE0ABF5-7690-4623-B971-046A51D617CD}" type="slidenum">
-              <a:rPr lang="en-US" altLang="en-US" smtClean="0"/>
-              <a:pPr/>
-              <a:t>49</a:t>
-            </a:fld>
-            <a:endParaRPr lang="en-US" altLang="en-US"/>
-          </a:p>
-        </p:txBody>
-      </p:sp>
-    </p:spTree>
-    <p:extLst>
-      <p:ext uri="{BB962C8B-B14F-4D97-AF65-F5344CB8AC3E}">
-        <p14:creationId xmlns:p14="http://schemas.microsoft.com/office/powerpoint/2010/main" val="2368576218"/>
       </p:ext>
     </p:extLst>
   </p:cSld>
@@ -6546,7 +6529,13 @@
   <p:cSld>
     <p:spTree>
       <p:nvGrpSpPr>
-        <p:cNvPr id="1" name=""/>
+        <p:cNvPr id="1" name="">
+          <a:extLst>
+            <a:ext uri="{FF2B5EF4-FFF2-40B4-BE49-F238E27FC236}">
+              <a16:creationId xmlns:a16="http://schemas.microsoft.com/office/drawing/2014/main" id="{A87EB321-74FE-9E72-D51E-5358A3934DB4}"/>
+            </a:ext>
+          </a:extLst>
+        </p:cNvPr>
         <p:cNvGrpSpPr/>
         <p:nvPr/>
       </p:nvGrpSpPr>
@@ -6560,212 +6549,73 @@
       </p:grpSpPr>
       <p:sp>
         <p:nvSpPr>
-          <p:cNvPr id="88066" name="Rectangle 7"/>
-          <p:cNvSpPr>
-            <a:spLocks noGrp="1" noChangeArrowheads="1"/>
-          </p:cNvSpPr>
-          <p:nvPr>
-            <p:ph type="sldNum" sz="quarter" idx="5"/>
-          </p:nvPr>
-        </p:nvSpPr>
-        <p:spPr>
-          <a:noFill/>
-          <a:ln/>
-          <a:extLst>
-            <a:ext uri="{909E8E84-426E-40DD-AFC4-6F175D3DCCD1}">
-              <a14:hiddenFill xmlns:a14="http://schemas.microsoft.com/office/drawing/2010/main">
-                <a:solidFill>
-                  <a:srgbClr val="FFFFFF"/>
-                </a:solidFill>
-              </a14:hiddenFill>
-            </a:ext>
-            <a:ext uri="{91240B29-F687-4F45-9708-019B960494DF}">
-              <a14:hiddenLine xmlns:a14="http://schemas.microsoft.com/office/drawing/2010/main" w="9525">
-                <a:solidFill>
-                  <a:srgbClr val="000000"/>
-                </a:solidFill>
-                <a:miter lim="800000"/>
-                <a:headEnd/>
-                <a:tailEnd/>
-              </a14:hiddenLine>
-            </a:ext>
-          </a:extLst>
-        </p:spPr>
+          <p:cNvPr id="2" name="Slide Image Placeholder 1">
+            <a:extLst>
+              <a:ext uri="{FF2B5EF4-FFF2-40B4-BE49-F238E27FC236}">
+                <a16:creationId xmlns:a16="http://schemas.microsoft.com/office/drawing/2014/main" id="{8E925B51-75B8-2647-45E9-940702565B1F}"/>
+              </a:ext>
+            </a:extLst>
+          </p:cNvPr>
+          <p:cNvSpPr>
+            <a:spLocks noGrp="1" noRot="1" noChangeAspect="1"/>
+          </p:cNvSpPr>
+          <p:nvPr>
+            <p:ph type="sldImg"/>
+          </p:nvPr>
+        </p:nvSpPr>
+        <p:spPr/>
+      </p:sp>
+      <p:sp>
+        <p:nvSpPr>
+          <p:cNvPr id="3" name="Notes Placeholder 2">
+            <a:extLst>
+              <a:ext uri="{FF2B5EF4-FFF2-40B4-BE49-F238E27FC236}">
+                <a16:creationId xmlns:a16="http://schemas.microsoft.com/office/drawing/2014/main" id="{BDDA2DCF-5847-56E6-95ED-433E0FA2FB28}"/>
+              </a:ext>
+            </a:extLst>
+          </p:cNvPr>
+          <p:cNvSpPr>
+            <a:spLocks noGrp="1"/>
+          </p:cNvSpPr>
+          <p:nvPr>
+            <p:ph type="body" idx="1"/>
+          </p:nvPr>
+        </p:nvSpPr>
+        <p:spPr/>
         <p:txBody>
           <a:bodyPr/>
-          <a:lstStyle>
-            <a:lvl1pPr defTabSz="923925">
-              <a:defRPr>
-                <a:solidFill>
-                  <a:schemeClr val="tx1"/>
-                </a:solidFill>
-                <a:latin typeface="Verdana" panose="020B0604030504040204" pitchFamily="34" charset="0"/>
-                <a:ea typeface="MS PGothic" panose="020B0600070205080204" pitchFamily="34" charset="-128"/>
-              </a:defRPr>
-            </a:lvl1pPr>
-            <a:lvl2pPr marL="742950" indent="-285750" defTabSz="923925">
-              <a:defRPr>
-                <a:solidFill>
-                  <a:schemeClr val="tx1"/>
-                </a:solidFill>
-                <a:latin typeface="Verdana" panose="020B0604030504040204" pitchFamily="34" charset="0"/>
-                <a:ea typeface="MS PGothic" panose="020B0600070205080204" pitchFamily="34" charset="-128"/>
-              </a:defRPr>
-            </a:lvl2pPr>
-            <a:lvl3pPr marL="1143000" indent="-228600" defTabSz="923925">
-              <a:defRPr>
-                <a:solidFill>
-                  <a:schemeClr val="tx1"/>
-                </a:solidFill>
-                <a:latin typeface="Verdana" panose="020B0604030504040204" pitchFamily="34" charset="0"/>
-                <a:ea typeface="MS PGothic" panose="020B0600070205080204" pitchFamily="34" charset="-128"/>
-              </a:defRPr>
-            </a:lvl3pPr>
-            <a:lvl4pPr marL="1600200" indent="-228600" defTabSz="923925">
-              <a:defRPr>
-                <a:solidFill>
-                  <a:schemeClr val="tx1"/>
-                </a:solidFill>
-                <a:latin typeface="Verdana" panose="020B0604030504040204" pitchFamily="34" charset="0"/>
-                <a:ea typeface="MS PGothic" panose="020B0600070205080204" pitchFamily="34" charset="-128"/>
-              </a:defRPr>
-            </a:lvl4pPr>
-            <a:lvl5pPr marL="2057400" indent="-228600" defTabSz="923925">
-              <a:defRPr>
-                <a:solidFill>
-                  <a:schemeClr val="tx1"/>
-                </a:solidFill>
-                <a:latin typeface="Verdana" panose="020B0604030504040204" pitchFamily="34" charset="0"/>
-                <a:ea typeface="MS PGothic" panose="020B0600070205080204" pitchFamily="34" charset="-128"/>
-              </a:defRPr>
-            </a:lvl5pPr>
-            <a:lvl6pPr marL="2514600" indent="-228600" defTabSz="923925" eaLnBrk="0" fontAlgn="base" hangingPunct="0">
-              <a:spcBef>
-                <a:spcPct val="0"/>
-              </a:spcBef>
-              <a:spcAft>
-                <a:spcPct val="0"/>
-              </a:spcAft>
-              <a:defRPr>
-                <a:solidFill>
-                  <a:schemeClr val="tx1"/>
-                </a:solidFill>
-                <a:latin typeface="Verdana" panose="020B0604030504040204" pitchFamily="34" charset="0"/>
-                <a:ea typeface="MS PGothic" panose="020B0600070205080204" pitchFamily="34" charset="-128"/>
-              </a:defRPr>
-            </a:lvl6pPr>
-            <a:lvl7pPr marL="2971800" indent="-228600" defTabSz="923925" eaLnBrk="0" fontAlgn="base" hangingPunct="0">
-              <a:spcBef>
-                <a:spcPct val="0"/>
-              </a:spcBef>
-              <a:spcAft>
-                <a:spcPct val="0"/>
-              </a:spcAft>
-              <a:defRPr>
-                <a:solidFill>
-                  <a:schemeClr val="tx1"/>
-                </a:solidFill>
-                <a:latin typeface="Verdana" panose="020B0604030504040204" pitchFamily="34" charset="0"/>
-                <a:ea typeface="MS PGothic" panose="020B0600070205080204" pitchFamily="34" charset="-128"/>
-              </a:defRPr>
-            </a:lvl7pPr>
-            <a:lvl8pPr marL="3429000" indent="-228600" defTabSz="923925" eaLnBrk="0" fontAlgn="base" hangingPunct="0">
-              <a:spcBef>
-                <a:spcPct val="0"/>
-              </a:spcBef>
-              <a:spcAft>
-                <a:spcPct val="0"/>
-              </a:spcAft>
-              <a:defRPr>
-                <a:solidFill>
-                  <a:schemeClr val="tx1"/>
-                </a:solidFill>
-                <a:latin typeface="Verdana" panose="020B0604030504040204" pitchFamily="34" charset="0"/>
-                <a:ea typeface="MS PGothic" panose="020B0600070205080204" pitchFamily="34" charset="-128"/>
-              </a:defRPr>
-            </a:lvl8pPr>
-            <a:lvl9pPr marL="3886200" indent="-228600" defTabSz="923925" eaLnBrk="0" fontAlgn="base" hangingPunct="0">
-              <a:spcBef>
-                <a:spcPct val="0"/>
-              </a:spcBef>
-              <a:spcAft>
-                <a:spcPct val="0"/>
-              </a:spcAft>
-              <a:defRPr>
-                <a:solidFill>
-                  <a:schemeClr val="tx1"/>
-                </a:solidFill>
-                <a:latin typeface="Verdana" panose="020B0604030504040204" pitchFamily="34" charset="0"/>
-                <a:ea typeface="MS PGothic" panose="020B0600070205080204" pitchFamily="34" charset="-128"/>
-              </a:defRPr>
-            </a:lvl9pPr>
-          </a:lstStyle>
-          <a:p>
-            <a:fld id="{94B1D134-850A-4179-8AB5-27314B993335}" type="slidenum">
-              <a:rPr lang="en-US" altLang="en-US">
-                <a:latin typeface="Times New Roman" panose="02020603050405020304" pitchFamily="18" charset="0"/>
-              </a:rPr>
+          <a:lstStyle/>
+          <a:p>
+            <a:endParaRPr lang="en-US" dirty="0"/>
+          </a:p>
+        </p:txBody>
+      </p:sp>
+      <p:sp>
+        <p:nvSpPr>
+          <p:cNvPr id="4" name="Slide Number Placeholder 3">
+            <a:extLst>
+              <a:ext uri="{FF2B5EF4-FFF2-40B4-BE49-F238E27FC236}">
+                <a16:creationId xmlns:a16="http://schemas.microsoft.com/office/drawing/2014/main" id="{6DDB16CC-D103-7938-581D-808CF59C9943}"/>
+              </a:ext>
+            </a:extLst>
+          </p:cNvPr>
+          <p:cNvSpPr>
+            <a:spLocks noGrp="1"/>
+          </p:cNvSpPr>
+          <p:nvPr>
+            <p:ph type="sldNum" sz="quarter" idx="10"/>
+          </p:nvPr>
+        </p:nvSpPr>
+        <p:spPr/>
+        <p:txBody>
+          <a:bodyPr/>
+          <a:lstStyle/>
+          <a:p>
+            <a:fld id="{CAE0ABF5-7690-4623-B971-046A51D617CD}" type="slidenum">
+              <a:rPr lang="en-US" altLang="en-US" smtClean="0"/>
               <a:pPr/>
-              <a:t>50</a:t>
+              <a:t>49</a:t>
             </a:fld>
-            <a:endParaRPr lang="en-US" altLang="en-US">
-              <a:latin typeface="Times New Roman" panose="02020603050405020304" pitchFamily="18" charset="0"/>
-            </a:endParaRPr>
-          </a:p>
-        </p:txBody>
-      </p:sp>
-      <p:sp>
-        <p:nvSpPr>
-          <p:cNvPr id="88067" name="Rectangle 2"/>
-          <p:cNvSpPr>
-            <a:spLocks noGrp="1" noRot="1" noChangeAspect="1" noChangeArrowheads="1" noTextEdit="1"/>
-          </p:cNvSpPr>
-          <p:nvPr>
-            <p:ph type="sldImg"/>
-          </p:nvPr>
-        </p:nvSpPr>
-        <p:spPr>
-          <a:ln/>
-        </p:spPr>
-      </p:sp>
-      <p:sp>
-        <p:nvSpPr>
-          <p:cNvPr id="88068" name="Rectangle 3"/>
-          <p:cNvSpPr>
-            <a:spLocks noGrp="1" noChangeArrowheads="1"/>
-          </p:cNvSpPr>
-          <p:nvPr>
-            <p:ph type="body" idx="1"/>
-          </p:nvPr>
-        </p:nvSpPr>
-        <p:spPr>
-          <a:noFill/>
-          <a:ln/>
-          <a:extLst>
-            <a:ext uri="{909E8E84-426E-40DD-AFC4-6F175D3DCCD1}">
-              <a14:hiddenFill xmlns:a14="http://schemas.microsoft.com/office/drawing/2010/main">
-                <a:solidFill>
-                  <a:srgbClr val="FFFFFF"/>
-                </a:solidFill>
-              </a14:hiddenFill>
-            </a:ext>
-            <a:ext uri="{91240B29-F687-4F45-9708-019B960494DF}">
-              <a14:hiddenLine xmlns:a14="http://schemas.microsoft.com/office/drawing/2010/main" w="9525">
-                <a:solidFill>
-                  <a:srgbClr val="000000"/>
-                </a:solidFill>
-                <a:miter lim="800000"/>
-                <a:headEnd/>
-                <a:tailEnd/>
-              </a14:hiddenLine>
-            </a:ext>
-          </a:extLst>
-        </p:spPr>
-        <p:txBody>
-          <a:bodyPr/>
-          <a:lstStyle/>
-          <a:p>
-            <a:pPr eaLnBrk="1" hangingPunct="1"/>
             <a:endParaRPr lang="en-US" altLang="en-US"/>
           </a:p>
         </p:txBody>
@@ -6773,7 +6623,7 @@
     </p:spTree>
     <p:extLst>
       <p:ext uri="{BB962C8B-B14F-4D97-AF65-F5344CB8AC3E}">
-        <p14:creationId xmlns:p14="http://schemas.microsoft.com/office/powerpoint/2010/main" val="1600709815"/>
+        <p14:creationId xmlns:p14="http://schemas.microsoft.com/office/powerpoint/2010/main" val="2368576218"/>
       </p:ext>
     </p:extLst>
   </p:cSld>
@@ -6802,7 +6652,7 @@
       </p:grpSpPr>
       <p:sp>
         <p:nvSpPr>
-          <p:cNvPr id="89090" name="Rectangle 7"/>
+          <p:cNvPr id="88066" name="Rectangle 7"/>
           <p:cNvSpPr>
             <a:spLocks noGrp="1" noChangeArrowheads="1"/>
           </p:cNvSpPr>
@@ -6943,12 +6793,12 @@
             </a:lvl9pPr>
           </a:lstStyle>
           <a:p>
-            <a:fld id="{6E940149-BF14-45B4-82CA-B38D8EAF2464}" type="slidenum">
+            <a:fld id="{94B1D134-850A-4179-8AB5-27314B993335}" type="slidenum">
               <a:rPr lang="en-US" altLang="en-US">
                 <a:latin typeface="Times New Roman" panose="02020603050405020304" pitchFamily="18" charset="0"/>
               </a:rPr>
               <a:pPr/>
-              <a:t>51</a:t>
+              <a:t>50</a:t>
             </a:fld>
             <a:endParaRPr lang="en-US" altLang="en-US">
               <a:latin typeface="Times New Roman" panose="02020603050405020304" pitchFamily="18" charset="0"/>
@@ -6958,7 +6808,7 @@
       </p:sp>
       <p:sp>
         <p:nvSpPr>
-          <p:cNvPr id="89091" name="Rectangle 2"/>
+          <p:cNvPr id="88067" name="Rectangle 2"/>
           <p:cNvSpPr>
             <a:spLocks noGrp="1" noRot="1" noChangeAspect="1" noChangeArrowheads="1" noTextEdit="1"/>
           </p:cNvSpPr>
@@ -6972,7 +6822,7 @@
       </p:sp>
       <p:sp>
         <p:nvSpPr>
-          <p:cNvPr id="89092" name="Rectangle 3"/>
+          <p:cNvPr id="88068" name="Rectangle 3"/>
           <p:cNvSpPr>
             <a:spLocks noGrp="1" noChangeArrowheads="1"/>
           </p:cNvSpPr>
@@ -7015,7 +6865,7 @@
     </p:spTree>
     <p:extLst>
       <p:ext uri="{BB962C8B-B14F-4D97-AF65-F5344CB8AC3E}">
-        <p14:creationId xmlns:p14="http://schemas.microsoft.com/office/powerpoint/2010/main" val="3566095115"/>
+        <p14:creationId xmlns:p14="http://schemas.microsoft.com/office/powerpoint/2010/main" val="1600709815"/>
       </p:ext>
     </p:extLst>
   </p:cSld>
@@ -7044,7 +6894,7 @@
       </p:grpSpPr>
       <p:sp>
         <p:nvSpPr>
-          <p:cNvPr id="90114" name="Rectangle 7"/>
+          <p:cNvPr id="89090" name="Rectangle 7"/>
           <p:cNvSpPr>
             <a:spLocks noGrp="1" noChangeArrowheads="1"/>
           </p:cNvSpPr>
@@ -7185,12 +7035,12 @@
             </a:lvl9pPr>
           </a:lstStyle>
           <a:p>
-            <a:fld id="{6BCDB1EE-CC89-4FB6-A722-3BDC79779409}" type="slidenum">
+            <a:fld id="{6E940149-BF14-45B4-82CA-B38D8EAF2464}" type="slidenum">
               <a:rPr lang="en-US" altLang="en-US">
                 <a:latin typeface="Times New Roman" panose="02020603050405020304" pitchFamily="18" charset="0"/>
               </a:rPr>
               <a:pPr/>
-              <a:t>52</a:t>
+              <a:t>51</a:t>
             </a:fld>
             <a:endParaRPr lang="en-US" altLang="en-US">
               <a:latin typeface="Times New Roman" panose="02020603050405020304" pitchFamily="18" charset="0"/>
@@ -7200,7 +7050,7 @@
       </p:sp>
       <p:sp>
         <p:nvSpPr>
-          <p:cNvPr id="90115" name="Rectangle 2"/>
+          <p:cNvPr id="89091" name="Rectangle 2"/>
           <p:cNvSpPr>
             <a:spLocks noGrp="1" noRot="1" noChangeAspect="1" noChangeArrowheads="1" noTextEdit="1"/>
           </p:cNvSpPr>
@@ -7214,7 +7064,7 @@
       </p:sp>
       <p:sp>
         <p:nvSpPr>
-          <p:cNvPr id="90116" name="Rectangle 3"/>
+          <p:cNvPr id="89092" name="Rectangle 3"/>
           <p:cNvSpPr>
             <a:spLocks noGrp="1" noChangeArrowheads="1"/>
           </p:cNvSpPr>
@@ -7257,7 +7107,7 @@
     </p:spTree>
     <p:extLst>
       <p:ext uri="{BB962C8B-B14F-4D97-AF65-F5344CB8AC3E}">
-        <p14:creationId xmlns:p14="http://schemas.microsoft.com/office/powerpoint/2010/main" val="4073403759"/>
+        <p14:creationId xmlns:p14="http://schemas.microsoft.com/office/powerpoint/2010/main" val="3566095115"/>
       </p:ext>
     </p:extLst>
   </p:cSld>
@@ -7286,7 +7136,7 @@
       </p:grpSpPr>
       <p:sp>
         <p:nvSpPr>
-          <p:cNvPr id="91138" name="Rectangle 7"/>
+          <p:cNvPr id="90114" name="Rectangle 7"/>
           <p:cNvSpPr>
             <a:spLocks noGrp="1" noChangeArrowheads="1"/>
           </p:cNvSpPr>
@@ -7427,12 +7277,12 @@
             </a:lvl9pPr>
           </a:lstStyle>
           <a:p>
-            <a:fld id="{A3F1B1A2-C3C1-4054-A7B9-667F21ADB782}" type="slidenum">
+            <a:fld id="{6BCDB1EE-CC89-4FB6-A722-3BDC79779409}" type="slidenum">
               <a:rPr lang="en-US" altLang="en-US">
                 <a:latin typeface="Times New Roman" panose="02020603050405020304" pitchFamily="18" charset="0"/>
               </a:rPr>
               <a:pPr/>
-              <a:t>53</a:t>
+              <a:t>52</a:t>
             </a:fld>
             <a:endParaRPr lang="en-US" altLang="en-US">
               <a:latin typeface="Times New Roman" panose="02020603050405020304" pitchFamily="18" charset="0"/>
@@ -7442,7 +7292,7 @@
       </p:sp>
       <p:sp>
         <p:nvSpPr>
-          <p:cNvPr id="91139" name="Rectangle 2"/>
+          <p:cNvPr id="90115" name="Rectangle 2"/>
           <p:cNvSpPr>
             <a:spLocks noGrp="1" noRot="1" noChangeAspect="1" noChangeArrowheads="1" noTextEdit="1"/>
           </p:cNvSpPr>
@@ -7456,7 +7306,7 @@
       </p:sp>
       <p:sp>
         <p:nvSpPr>
-          <p:cNvPr id="91140" name="Rectangle 3"/>
+          <p:cNvPr id="90116" name="Rectangle 3"/>
           <p:cNvSpPr>
             <a:spLocks noGrp="1" noChangeArrowheads="1"/>
           </p:cNvSpPr>
@@ -7492,14 +7342,14 @@
           <a:lstStyle/>
           <a:p>
             <a:pPr eaLnBrk="1" hangingPunct="1"/>
-            <a:endParaRPr lang="en-US" altLang="en-US"/>
+            <a:endParaRPr lang="en-US" altLang="en-US" dirty="0"/>
           </a:p>
         </p:txBody>
       </p:sp>
     </p:spTree>
     <p:extLst>
       <p:ext uri="{BB962C8B-B14F-4D97-AF65-F5344CB8AC3E}">
-        <p14:creationId xmlns:p14="http://schemas.microsoft.com/office/powerpoint/2010/main" val="1322191936"/>
+        <p14:creationId xmlns:p14="http://schemas.microsoft.com/office/powerpoint/2010/main" val="4073403759"/>
       </p:ext>
     </p:extLst>
   </p:cSld>
@@ -7528,58 +7378,212 @@
       </p:grpSpPr>
       <p:sp>
         <p:nvSpPr>
-          <p:cNvPr id="2" name="Slide Image Placeholder 1"/>
-          <p:cNvSpPr>
-            <a:spLocks noGrp="1" noRot="1" noChangeAspect="1"/>
+          <p:cNvPr id="91138" name="Rectangle 7"/>
+          <p:cNvSpPr>
+            <a:spLocks noGrp="1" noChangeArrowheads="1"/>
+          </p:cNvSpPr>
+          <p:nvPr>
+            <p:ph type="sldNum" sz="quarter" idx="5"/>
+          </p:nvPr>
+        </p:nvSpPr>
+        <p:spPr>
+          <a:noFill/>
+          <a:ln/>
+          <a:extLst>
+            <a:ext uri="{909E8E84-426E-40DD-AFC4-6F175D3DCCD1}">
+              <a14:hiddenFill xmlns:a14="http://schemas.microsoft.com/office/drawing/2010/main">
+                <a:solidFill>
+                  <a:srgbClr val="FFFFFF"/>
+                </a:solidFill>
+              </a14:hiddenFill>
+            </a:ext>
+            <a:ext uri="{91240B29-F687-4F45-9708-019B960494DF}">
+              <a14:hiddenLine xmlns:a14="http://schemas.microsoft.com/office/drawing/2010/main" w="9525">
+                <a:solidFill>
+                  <a:srgbClr val="000000"/>
+                </a:solidFill>
+                <a:miter lim="800000"/>
+                <a:headEnd/>
+                <a:tailEnd/>
+              </a14:hiddenLine>
+            </a:ext>
+          </a:extLst>
+        </p:spPr>
+        <p:txBody>
+          <a:bodyPr/>
+          <a:lstStyle>
+            <a:lvl1pPr defTabSz="923925">
+              <a:defRPr>
+                <a:solidFill>
+                  <a:schemeClr val="tx1"/>
+                </a:solidFill>
+                <a:latin typeface="Verdana" panose="020B0604030504040204" pitchFamily="34" charset="0"/>
+                <a:ea typeface="MS PGothic" panose="020B0600070205080204" pitchFamily="34" charset="-128"/>
+              </a:defRPr>
+            </a:lvl1pPr>
+            <a:lvl2pPr marL="742950" indent="-285750" defTabSz="923925">
+              <a:defRPr>
+                <a:solidFill>
+                  <a:schemeClr val="tx1"/>
+                </a:solidFill>
+                <a:latin typeface="Verdana" panose="020B0604030504040204" pitchFamily="34" charset="0"/>
+                <a:ea typeface="MS PGothic" panose="020B0600070205080204" pitchFamily="34" charset="-128"/>
+              </a:defRPr>
+            </a:lvl2pPr>
+            <a:lvl3pPr marL="1143000" indent="-228600" defTabSz="923925">
+              <a:defRPr>
+                <a:solidFill>
+                  <a:schemeClr val="tx1"/>
+                </a:solidFill>
+                <a:latin typeface="Verdana" panose="020B0604030504040204" pitchFamily="34" charset="0"/>
+                <a:ea typeface="MS PGothic" panose="020B0600070205080204" pitchFamily="34" charset="-128"/>
+              </a:defRPr>
+            </a:lvl3pPr>
+            <a:lvl4pPr marL="1600200" indent="-228600" defTabSz="923925">
+              <a:defRPr>
+                <a:solidFill>
+                  <a:schemeClr val="tx1"/>
+                </a:solidFill>
+                <a:latin typeface="Verdana" panose="020B0604030504040204" pitchFamily="34" charset="0"/>
+                <a:ea typeface="MS PGothic" panose="020B0600070205080204" pitchFamily="34" charset="-128"/>
+              </a:defRPr>
+            </a:lvl4pPr>
+            <a:lvl5pPr marL="2057400" indent="-228600" defTabSz="923925">
+              <a:defRPr>
+                <a:solidFill>
+                  <a:schemeClr val="tx1"/>
+                </a:solidFill>
+                <a:latin typeface="Verdana" panose="020B0604030504040204" pitchFamily="34" charset="0"/>
+                <a:ea typeface="MS PGothic" panose="020B0600070205080204" pitchFamily="34" charset="-128"/>
+              </a:defRPr>
+            </a:lvl5pPr>
+            <a:lvl6pPr marL="2514600" indent="-228600" defTabSz="923925" eaLnBrk="0" fontAlgn="base" hangingPunct="0">
+              <a:spcBef>
+                <a:spcPct val="0"/>
+              </a:spcBef>
+              <a:spcAft>
+                <a:spcPct val="0"/>
+              </a:spcAft>
+              <a:defRPr>
+                <a:solidFill>
+                  <a:schemeClr val="tx1"/>
+                </a:solidFill>
+                <a:latin typeface="Verdana" panose="020B0604030504040204" pitchFamily="34" charset="0"/>
+                <a:ea typeface="MS PGothic" panose="020B0600070205080204" pitchFamily="34" charset="-128"/>
+              </a:defRPr>
+            </a:lvl6pPr>
+            <a:lvl7pPr marL="2971800" indent="-228600" defTabSz="923925" eaLnBrk="0" fontAlgn="base" hangingPunct="0">
+              <a:spcBef>
+                <a:spcPct val="0"/>
+              </a:spcBef>
+              <a:spcAft>
+                <a:spcPct val="0"/>
+              </a:spcAft>
+              <a:defRPr>
+                <a:solidFill>
+                  <a:schemeClr val="tx1"/>
+                </a:solidFill>
+                <a:latin typeface="Verdana" panose="020B0604030504040204" pitchFamily="34" charset="0"/>
+                <a:ea typeface="MS PGothic" panose="020B0600070205080204" pitchFamily="34" charset="-128"/>
+              </a:defRPr>
+            </a:lvl7pPr>
+            <a:lvl8pPr marL="3429000" indent="-228600" defTabSz="923925" eaLnBrk="0" fontAlgn="base" hangingPunct="0">
+              <a:spcBef>
+                <a:spcPct val="0"/>
+              </a:spcBef>
+              <a:spcAft>
+                <a:spcPct val="0"/>
+              </a:spcAft>
+              <a:defRPr>
+                <a:solidFill>
+                  <a:schemeClr val="tx1"/>
+                </a:solidFill>
+                <a:latin typeface="Verdana" panose="020B0604030504040204" pitchFamily="34" charset="0"/>
+                <a:ea typeface="MS PGothic" panose="020B0600070205080204" pitchFamily="34" charset="-128"/>
+              </a:defRPr>
+            </a:lvl8pPr>
+            <a:lvl9pPr marL="3886200" indent="-228600" defTabSz="923925" eaLnBrk="0" fontAlgn="base" hangingPunct="0">
+              <a:spcBef>
+                <a:spcPct val="0"/>
+              </a:spcBef>
+              <a:spcAft>
+                <a:spcPct val="0"/>
+              </a:spcAft>
+              <a:defRPr>
+                <a:solidFill>
+                  <a:schemeClr val="tx1"/>
+                </a:solidFill>
+                <a:latin typeface="Verdana" panose="020B0604030504040204" pitchFamily="34" charset="0"/>
+                <a:ea typeface="MS PGothic" panose="020B0600070205080204" pitchFamily="34" charset="-128"/>
+              </a:defRPr>
+            </a:lvl9pPr>
+          </a:lstStyle>
+          <a:p>
+            <a:fld id="{A3F1B1A2-C3C1-4054-A7B9-667F21ADB782}" type="slidenum">
+              <a:rPr lang="en-US" altLang="en-US">
+                <a:latin typeface="Times New Roman" panose="02020603050405020304" pitchFamily="18" charset="0"/>
+              </a:rPr>
+              <a:pPr/>
+              <a:t>53</a:t>
+            </a:fld>
+            <a:endParaRPr lang="en-US" altLang="en-US">
+              <a:latin typeface="Times New Roman" panose="02020603050405020304" pitchFamily="18" charset="0"/>
+            </a:endParaRPr>
+          </a:p>
+        </p:txBody>
+      </p:sp>
+      <p:sp>
+        <p:nvSpPr>
+          <p:cNvPr id="91139" name="Rectangle 2"/>
+          <p:cNvSpPr>
+            <a:spLocks noGrp="1" noRot="1" noChangeAspect="1" noChangeArrowheads="1" noTextEdit="1"/>
           </p:cNvSpPr>
           <p:nvPr>
             <p:ph type="sldImg"/>
           </p:nvPr>
         </p:nvSpPr>
-        <p:spPr/>
-      </p:sp>
-      <p:sp>
-        <p:nvSpPr>
-          <p:cNvPr id="3" name="Notes Placeholder 2"/>
-          <p:cNvSpPr>
-            <a:spLocks noGrp="1"/>
+        <p:spPr>
+          <a:ln/>
+        </p:spPr>
+      </p:sp>
+      <p:sp>
+        <p:nvSpPr>
+          <p:cNvPr id="91140" name="Rectangle 3"/>
+          <p:cNvSpPr>
+            <a:spLocks noGrp="1" noChangeArrowheads="1"/>
           </p:cNvSpPr>
           <p:nvPr>
             <p:ph type="body" idx="1"/>
           </p:nvPr>
         </p:nvSpPr>
-        <p:spPr/>
+        <p:spPr>
+          <a:noFill/>
+          <a:ln/>
+          <a:extLst>
+            <a:ext uri="{909E8E84-426E-40DD-AFC4-6F175D3DCCD1}">
+              <a14:hiddenFill xmlns:a14="http://schemas.microsoft.com/office/drawing/2010/main">
+                <a:solidFill>
+                  <a:srgbClr val="FFFFFF"/>
+                </a:solidFill>
+              </a14:hiddenFill>
+            </a:ext>
+            <a:ext uri="{91240B29-F687-4F45-9708-019B960494DF}">
+              <a14:hiddenLine xmlns:a14="http://schemas.microsoft.com/office/drawing/2010/main" w="9525">
+                <a:solidFill>
+                  <a:srgbClr val="000000"/>
+                </a:solidFill>
+                <a:miter lim="800000"/>
+                <a:headEnd/>
+                <a:tailEnd/>
+              </a14:hiddenLine>
+            </a:ext>
+          </a:extLst>
+        </p:spPr>
         <p:txBody>
           <a:bodyPr/>
           <a:lstStyle/>
           <a:p>
-            <a:r>
-              <a:rPr lang="en-US" dirty="0"/>
-              <a:t>1</a:t>
-            </a:r>
-          </a:p>
-        </p:txBody>
-      </p:sp>
-      <p:sp>
-        <p:nvSpPr>
-          <p:cNvPr id="4" name="Slide Number Placeholder 3"/>
-          <p:cNvSpPr>
-            <a:spLocks noGrp="1"/>
-          </p:cNvSpPr>
-          <p:nvPr>
-            <p:ph type="sldNum" sz="quarter" idx="5"/>
-          </p:nvPr>
-        </p:nvSpPr>
-        <p:spPr/>
-        <p:txBody>
-          <a:bodyPr/>
-          <a:lstStyle/>
-          <a:p>
-            <a:fld id="{CAE0ABF5-7690-4623-B971-046A51D617CD}" type="slidenum">
-              <a:rPr lang="en-US" altLang="en-US" smtClean="0"/>
-              <a:pPr/>
-              <a:t>55</a:t>
-            </a:fld>
+            <a:pPr eaLnBrk="1" hangingPunct="1"/>
             <a:endParaRPr lang="en-US" altLang="en-US"/>
           </a:p>
         </p:txBody>
@@ -7587,7 +7591,7 @@
     </p:spTree>
     <p:extLst>
       <p:ext uri="{BB962C8B-B14F-4D97-AF65-F5344CB8AC3E}">
-        <p14:creationId xmlns:p14="http://schemas.microsoft.com/office/powerpoint/2010/main" val="1563920115"/>
+        <p14:creationId xmlns:p14="http://schemas.microsoft.com/office/powerpoint/2010/main" val="1322191936"/>
       </p:ext>
     </p:extLst>
   </p:cSld>
@@ -7643,7 +7647,7 @@
           <a:p>
             <a:r>
               <a:rPr lang="en-US" dirty="0"/>
-              <a:t>2</a:t>
+              <a:t>1</a:t>
             </a:r>
           </a:p>
         </p:txBody>
@@ -7666,7 +7670,7 @@
             <a:fld id="{CAE0ABF5-7690-4623-B971-046A51D617CD}" type="slidenum">
               <a:rPr lang="en-US" altLang="en-US" smtClean="0"/>
               <a:pPr/>
-              <a:t>56</a:t>
+              <a:t>55</a:t>
             </a:fld>
             <a:endParaRPr lang="en-US" altLang="en-US"/>
           </a:p>
@@ -7675,7 +7679,7 @@
     </p:spTree>
     <p:extLst>
       <p:ext uri="{BB962C8B-B14F-4D97-AF65-F5344CB8AC3E}">
-        <p14:creationId xmlns:p14="http://schemas.microsoft.com/office/powerpoint/2010/main" val="20567884"/>
+        <p14:creationId xmlns:p14="http://schemas.microsoft.com/office/powerpoint/2010/main" val="1563920115"/>
       </p:ext>
     </p:extLst>
   </p:cSld>
@@ -7731,7 +7735,7 @@
           <a:p>
             <a:r>
               <a:rPr lang="en-US" dirty="0"/>
-              <a:t>3 4</a:t>
+              <a:t>2</a:t>
             </a:r>
           </a:p>
         </p:txBody>
@@ -7754,7 +7758,7 @@
             <a:fld id="{CAE0ABF5-7690-4623-B971-046A51D617CD}" type="slidenum">
               <a:rPr lang="en-US" altLang="en-US" smtClean="0"/>
               <a:pPr/>
-              <a:t>57</a:t>
+              <a:t>56</a:t>
             </a:fld>
             <a:endParaRPr lang="en-US" altLang="en-US"/>
           </a:p>
@@ -7763,7 +7767,7 @@
     </p:spTree>
     <p:extLst>
       <p:ext uri="{BB962C8B-B14F-4D97-AF65-F5344CB8AC3E}">
-        <p14:creationId xmlns:p14="http://schemas.microsoft.com/office/powerpoint/2010/main" val="3814815025"/>
+        <p14:creationId xmlns:p14="http://schemas.microsoft.com/office/powerpoint/2010/main" val="20567884"/>
       </p:ext>
     </p:extLst>
   </p:cSld>
@@ -7819,7 +7823,7 @@
           <a:p>
             <a:r>
               <a:rPr lang="en-US" dirty="0"/>
-              <a:t>1</a:t>
+              <a:t>3 4</a:t>
             </a:r>
           </a:p>
         </p:txBody>
@@ -7842,7 +7846,7 @@
             <a:fld id="{CAE0ABF5-7690-4623-B971-046A51D617CD}" type="slidenum">
               <a:rPr lang="en-US" altLang="en-US" smtClean="0"/>
               <a:pPr/>
-              <a:t>58</a:t>
+              <a:t>57</a:t>
             </a:fld>
             <a:endParaRPr lang="en-US" altLang="en-US"/>
           </a:p>
@@ -7851,7 +7855,7 @@
     </p:spTree>
     <p:extLst>
       <p:ext uri="{BB962C8B-B14F-4D97-AF65-F5344CB8AC3E}">
-        <p14:creationId xmlns:p14="http://schemas.microsoft.com/office/powerpoint/2010/main" val="1058236479"/>
+        <p14:creationId xmlns:p14="http://schemas.microsoft.com/office/powerpoint/2010/main" val="3814815025"/>
       </p:ext>
     </p:extLst>
   </p:cSld>
@@ -7907,7 +7911,7 @@
           <a:p>
             <a:r>
               <a:rPr lang="en-US" dirty="0"/>
-              <a:t>3</a:t>
+              <a:t>1</a:t>
             </a:r>
           </a:p>
         </p:txBody>
@@ -7930,7 +7934,7 @@
             <a:fld id="{CAE0ABF5-7690-4623-B971-046A51D617CD}" type="slidenum">
               <a:rPr lang="en-US" altLang="en-US" smtClean="0"/>
               <a:pPr/>
-              <a:t>59</a:t>
+              <a:t>58</a:t>
             </a:fld>
             <a:endParaRPr lang="en-US" altLang="en-US"/>
           </a:p>
@@ -7939,7 +7943,7 @@
     </p:spTree>
     <p:extLst>
       <p:ext uri="{BB962C8B-B14F-4D97-AF65-F5344CB8AC3E}">
-        <p14:creationId xmlns:p14="http://schemas.microsoft.com/office/powerpoint/2010/main" val="1226731704"/>
+        <p14:creationId xmlns:p14="http://schemas.microsoft.com/office/powerpoint/2010/main" val="1058236479"/>
       </p:ext>
     </p:extLst>
   </p:cSld>
@@ -8018,7 +8022,7 @@
             <a:fld id="{CAE0ABF5-7690-4623-B971-046A51D617CD}" type="slidenum">
               <a:rPr lang="en-US" altLang="en-US" smtClean="0"/>
               <a:pPr/>
-              <a:t>60</a:t>
+              <a:t>59</a:t>
             </a:fld>
             <a:endParaRPr lang="en-US" altLang="en-US"/>
           </a:p>
@@ -8027,7 +8031,7 @@
     </p:spTree>
     <p:extLst>
       <p:ext uri="{BB962C8B-B14F-4D97-AF65-F5344CB8AC3E}">
-        <p14:creationId xmlns:p14="http://schemas.microsoft.com/office/powerpoint/2010/main" val="1323319121"/>
+        <p14:creationId xmlns:p14="http://schemas.microsoft.com/office/powerpoint/2010/main" val="1226731704"/>
       </p:ext>
     </p:extLst>
   </p:cSld>
@@ -8166,33 +8170,9 @@
           <a:bodyPr/>
           <a:lstStyle/>
           <a:p>
-            <a:pPr marL="0" marR="0" lvl="0" indent="0" algn="l" defTabSz="914400" rtl="0" eaLnBrk="0" fontAlgn="base" latinLnBrk="0" hangingPunct="0">
-              <a:lnSpc>
-                <a:spcPct val="100000"/>
-              </a:lnSpc>
-              <a:spcBef>
-                <a:spcPct val="30000"/>
-              </a:spcBef>
-              <a:spcAft>
-                <a:spcPct val="0"/>
-              </a:spcAft>
-              <a:buClrTx/>
-              <a:buSzTx/>
-              <a:buFontTx/>
-              <a:buNone/>
-              <a:tabLst/>
-              <a:defRPr/>
-            </a:pPr>
-            <a:r>
-              <a:rPr lang="en-US" sz="1200" dirty="0"/>
-              <a:t>(12 * 8 /KB/) + (2048 * 8 /KB) + (2048 * 2048 * 8 /KB/) </a:t>
-            </a:r>
-            <a:br>
-              <a:rPr lang="en-US" sz="1200" dirty="0"/>
-            </a:br>
-            <a:r>
-              <a:rPr lang="en-US" sz="1200" dirty="0"/>
-              <a:t>+ (2048 * 2048 * 2048 * 8 /KB) = 64 terabytes</a:t>
+            <a:r>
+              <a:rPr lang="en-US" dirty="0"/>
+              <a:t>3</a:t>
             </a:r>
           </a:p>
         </p:txBody>
@@ -8215,7 +8195,7 @@
             <a:fld id="{CAE0ABF5-7690-4623-B971-046A51D617CD}" type="slidenum">
               <a:rPr lang="en-US" altLang="en-US" smtClean="0"/>
               <a:pPr/>
-              <a:t>61</a:t>
+              <a:t>60</a:t>
             </a:fld>
             <a:endParaRPr lang="en-US" altLang="en-US"/>
           </a:p>
@@ -8224,7 +8204,7 @@
     </p:spTree>
     <p:extLst>
       <p:ext uri="{BB962C8B-B14F-4D97-AF65-F5344CB8AC3E}">
-        <p14:creationId xmlns:p14="http://schemas.microsoft.com/office/powerpoint/2010/main" val="2705930493"/>
+        <p14:creationId xmlns:p14="http://schemas.microsoft.com/office/powerpoint/2010/main" val="1323319121"/>
       </p:ext>
     </p:extLst>
   </p:cSld>
@@ -8297,6 +8277,118 @@
             </a:pPr>
             <a:r>
               <a:rPr lang="en-US" sz="1200" dirty="0"/>
+              <a:t>(12 * 8 /KB/) + (2048 * 8 /KB) + (2048 * 2048 * 8 /KB/) </a:t>
+            </a:r>
+            <a:br>
+              <a:rPr lang="en-US" sz="1200" dirty="0"/>
+            </a:br>
+            <a:r>
+              <a:rPr lang="en-US" sz="1200" dirty="0"/>
+              <a:t>+ (2048 * 2048 * 2048 * 8 /KB) = 64 terabytes</a:t>
+            </a:r>
+          </a:p>
+        </p:txBody>
+      </p:sp>
+      <p:sp>
+        <p:nvSpPr>
+          <p:cNvPr id="4" name="Slide Number Placeholder 3"/>
+          <p:cNvSpPr>
+            <a:spLocks noGrp="1"/>
+          </p:cNvSpPr>
+          <p:nvPr>
+            <p:ph type="sldNum" sz="quarter" idx="5"/>
+          </p:nvPr>
+        </p:nvSpPr>
+        <p:spPr/>
+        <p:txBody>
+          <a:bodyPr/>
+          <a:lstStyle/>
+          <a:p>
+            <a:fld id="{CAE0ABF5-7690-4623-B971-046A51D617CD}" type="slidenum">
+              <a:rPr lang="en-US" altLang="en-US" smtClean="0"/>
+              <a:pPr/>
+              <a:t>61</a:t>
+            </a:fld>
+            <a:endParaRPr lang="en-US" altLang="en-US"/>
+          </a:p>
+        </p:txBody>
+      </p:sp>
+    </p:spTree>
+    <p:extLst>
+      <p:ext uri="{BB962C8B-B14F-4D97-AF65-F5344CB8AC3E}">
+        <p14:creationId xmlns:p14="http://schemas.microsoft.com/office/powerpoint/2010/main" val="2705930493"/>
+      </p:ext>
+    </p:extLst>
+  </p:cSld>
+  <p:clrMapOvr>
+    <a:masterClrMapping/>
+  </p:clrMapOvr>
+</p:notes>
+</file>
+
+<file path=ppt/notesSlides/notesSlide52.xml><?xml version="1.0" encoding="utf-8"?>
+<p:notes xmlns:a="http://schemas.openxmlformats.org/drawingml/2006/main" xmlns:r="http://schemas.openxmlformats.org/officeDocument/2006/relationships" xmlns:p="http://schemas.openxmlformats.org/presentationml/2006/main">
+  <p:cSld>
+    <p:spTree>
+      <p:nvGrpSpPr>
+        <p:cNvPr id="1" name=""/>
+        <p:cNvGrpSpPr/>
+        <p:nvPr/>
+      </p:nvGrpSpPr>
+      <p:grpSpPr>
+        <a:xfrm>
+          <a:off x="0" y="0"/>
+          <a:ext cx="0" cy="0"/>
+          <a:chOff x="0" y="0"/>
+          <a:chExt cx="0" cy="0"/>
+        </a:xfrm>
+      </p:grpSpPr>
+      <p:sp>
+        <p:nvSpPr>
+          <p:cNvPr id="2" name="Slide Image Placeholder 1"/>
+          <p:cNvSpPr>
+            <a:spLocks noGrp="1" noRot="1" noChangeAspect="1"/>
+          </p:cNvSpPr>
+          <p:nvPr>
+            <p:ph type="sldImg"/>
+          </p:nvPr>
+        </p:nvSpPr>
+        <p:spPr/>
+      </p:sp>
+      <p:sp>
+        <p:nvSpPr>
+          <p:cNvPr id="3" name="Notes Placeholder 2"/>
+          <p:cNvSpPr>
+            <a:spLocks noGrp="1"/>
+          </p:cNvSpPr>
+          <p:nvPr>
+            <p:ph type="body" idx="1"/>
+          </p:nvPr>
+        </p:nvSpPr>
+        <p:spPr/>
+        <p:txBody>
+          <a:bodyPr/>
+          <a:lstStyle/>
+          <a:p>
+            <a:pPr marL="0" marR="0" lvl="0" indent="0" algn="l" defTabSz="914400" rtl="0" eaLnBrk="0" fontAlgn="base" latinLnBrk="0" hangingPunct="0">
+              <a:lnSpc>
+                <a:spcPct val="100000"/>
+              </a:lnSpc>
+              <a:spcBef>
+                <a:spcPct val="30000"/>
+              </a:spcBef>
+              <a:spcAft>
+                <a:spcPct val="0"/>
+              </a:spcAft>
+              <a:buClrTx/>
+              <a:buSzTx/>
+              <a:buFontTx/>
+              <a:buNone/>
+              <a:tabLst/>
+              <a:defRPr/>
+            </a:pPr>
+            <a:r>
+              <a:rPr lang="en-US" sz="1200" dirty="0"/>
               <a:t>The advantage is that while accessing a block that is stored at the middle of a file, its location can be determined by chasing the pointers stored in the FAT as opposed to accessing all of the individual blocks of the file in a sequential manner to find the pointer to the target block. Typically, most of the FAT can be cached in memory and therefore the pointers can be determined with just memory accesses instead of having to access the disk blocks.</a:t>
             </a:r>
           </a:p>
@@ -8342,7 +8434,7 @@
 </p:notes>
 </file>
 
-<file path=ppt/notesSlides/notesSlide52.xml><?xml version="1.0" encoding="utf-8"?>
+<file path=ppt/notesSlides/notesSlide53.xml><?xml version="1.0" encoding="utf-8"?>
 <p:notes xmlns:a="http://schemas.openxmlformats.org/drawingml/2006/main" xmlns:r="http://schemas.openxmlformats.org/officeDocument/2006/relationships" xmlns:p="http://schemas.openxmlformats.org/presentationml/2006/main">
   <p:cSld>
     <p:spTree>
@@ -36381,7 +36473,7 @@
             </a:br>
             <a:r>
               <a:rPr lang="en-US" dirty="0"/>
-              <a:t>Table entry: 3 B</a:t>
+              <a:t>Table entry: 4 B</a:t>
             </a:r>
           </a:p>
         </p:txBody>
@@ -36409,7 +36501,7 @@
             <p:nvPr/>
           </p:nvPicPr>
           <p:blipFill>
-            <a:blip r:embed="rId2" cstate="print">
+            <a:blip r:embed="rId3" cstate="print">
               <a:extLst>
                 <a:ext uri="{28A0092B-C50C-407E-A947-70E740481C1C}">
                   <a14:useLocalDpi xmlns:a14="http://schemas.microsoft.com/office/drawing/2010/main" val="0"/>
@@ -36503,9 +36595,9 @@
         <p:grpSpPr>
           <a:xfrm>
             <a:off x="350274" y="5370514"/>
-            <a:ext cx="4070392" cy="914400"/>
+            <a:ext cx="4450325" cy="914400"/>
             <a:chOff x="350274" y="5370514"/>
-            <a:chExt cx="4070392" cy="914400"/>
+            <a:chExt cx="4450325" cy="914400"/>
           </a:xfrm>
         </p:grpSpPr>
         <p:sp>
@@ -36565,7 +36657,7 @@
           <p:spPr>
             <a:xfrm>
               <a:off x="1264674" y="5370514"/>
-              <a:ext cx="3155992" cy="738664"/>
+              <a:ext cx="3535925" cy="738664"/>
             </a:xfrm>
             <a:prstGeom prst="rect">
               <a:avLst/>
@@ -36573,7 +36665,7 @@
             <a:noFill/>
           </p:spPr>
           <p:txBody>
-            <a:bodyPr wrap="none" rtlCol="0">
+            <a:bodyPr wrap="square" rtlCol="0">
               <a:spAutoFit/>
             </a:bodyPr>
             <a:lstStyle/>
@@ -36584,14 +36676,7 @@
               </a:pPr>
               <a:r>
                 <a:rPr lang="en-US" sz="1400" dirty="0"/>
-                <a:t>When loaded in memory, disk</a:t>
-              </a:r>
-              <a:br>
-                <a:rPr lang="en-US" sz="1400" dirty="0"/>
-              </a:br>
-              <a:r>
-                <a:rPr lang="en-US" sz="1400" dirty="0"/>
-                <a:t>blocks used only for data.</a:t>
+                <a:t>The links are stored in the FAT, so data blocks contain only file data.</a:t>
               </a:r>
             </a:p>
             <a:p>
@@ -36810,7 +36895,7 @@
         <p:spPr>
           <a:xfrm>
             <a:off x="4800600" y="3048000"/>
-            <a:ext cx="3962400" cy="646331"/>
+            <a:ext cx="3962400" cy="923330"/>
           </a:xfrm>
           <a:prstGeom prst="rect">
             <a:avLst/>
@@ -36825,13 +36910,13 @@
           <a:p>
             <a:r>
               <a:rPr lang="en-US" dirty="0"/>
-              <a:t>40 x 1024 x 1024 blocks * 3 bytes/block</a:t>
+              <a:t>40 x 1024 x 1024 blocks * 4 bytes/block</a:t>
             </a:r>
           </a:p>
           <a:p>
             <a:r>
               <a:rPr lang="en-US" dirty="0"/>
-              <a:t>120 MB</a:t>
+              <a:t>160 MB</a:t>
             </a:r>
           </a:p>
         </p:txBody>
@@ -37243,7 +37328,7 @@
         </p:nvGrpSpPr>
         <p:grpSpPr>
           <a:xfrm>
-            <a:off x="350274" y="5370514"/>
+            <a:off x="55806" y="5370514"/>
             <a:ext cx="4768340" cy="954107"/>
             <a:chOff x="350274" y="5370514"/>
             <a:chExt cx="4768340" cy="954107"/>
@@ -37375,10 +37460,10 @@
         </p:nvGrpSpPr>
         <p:grpSpPr>
           <a:xfrm>
-            <a:off x="5303274" y="5370514"/>
-            <a:ext cx="3355350" cy="914400"/>
+            <a:off x="5008806" y="5370514"/>
+            <a:ext cx="4076700" cy="954107"/>
             <a:chOff x="5303274" y="5370514"/>
-            <a:chExt cx="3355350" cy="914400"/>
+            <a:chExt cx="4076700" cy="954107"/>
           </a:xfrm>
         </p:grpSpPr>
         <p:sp>
@@ -37438,7 +37523,7 @@
           <p:spPr>
             <a:xfrm>
               <a:off x="6293874" y="5370514"/>
-              <a:ext cx="2364750" cy="738664"/>
+              <a:ext cx="3086100" cy="954107"/>
             </a:xfrm>
             <a:prstGeom prst="rect">
               <a:avLst/>
@@ -37446,7 +37531,7 @@
             <a:noFill/>
           </p:spPr>
           <p:txBody>
-            <a:bodyPr wrap="none" rtlCol="0">
+            <a:bodyPr wrap="square" rtlCol="0">
               <a:spAutoFit/>
             </a:bodyPr>
             <a:lstStyle/>
@@ -37457,21 +37542,7 @@
               </a:pPr>
               <a:r>
                 <a:rPr lang="en-US" sz="1400" dirty="0"/>
-                <a:t>Complex if file grows</a:t>
-              </a:r>
-              <a:br>
-                <a:rPr lang="en-US" sz="1400" dirty="0"/>
-              </a:br>
-              <a:r>
-                <a:rPr lang="en-US" sz="1400" dirty="0"/>
-                <a:t>beyond number</a:t>
-              </a:r>
-              <a:br>
-                <a:rPr lang="en-US" sz="1400" dirty="0"/>
-              </a:br>
-              <a:r>
-                <a:rPr lang="en-US" sz="1400" dirty="0"/>
-                <a:t>of addresses.</a:t>
+                <a:t>Files can grow by allocating additional data and indirect blocks; multiple levels of indirection support large files</a:t>
               </a:r>
             </a:p>
           </p:txBody>
@@ -38672,7 +38743,7 @@
           <p:spPr>
             <a:xfrm>
               <a:off x="6695283" y="5955268"/>
-              <a:ext cx="853119" cy="369332"/>
+              <a:ext cx="1005403" cy="369332"/>
             </a:xfrm>
             <a:prstGeom prst="rect">
               <a:avLst/>
@@ -38687,7 +38758,7 @@
             <a:p>
               <a:r>
                 <a:rPr lang="en-US" dirty="0"/>
-                <a:t>bitmap</a:t>
+                <a:t>Bitmap</a:t>
               </a:r>
             </a:p>
           </p:txBody>
@@ -41618,8 +41689,8 @@
           <a:p>
             <a:pPr eaLnBrk="1" hangingPunct="1"/>
             <a:r>
-              <a:rPr lang="en-US" altLang="en-US"/>
-              <a:t>Access Lists and Groups</a:t>
+              <a:rPr lang="en-US" altLang="en-US" dirty="0"/>
+              <a:t>Unix mode bits and groups</a:t>
             </a:r>
           </a:p>
         </p:txBody>
@@ -41656,7 +41727,7 @@
               </a:tabLst>
             </a:pPr>
             <a:r>
-              <a:rPr lang="en-US" altLang="en-US"/>
+              <a:rPr lang="en-US" altLang="en-US" dirty="0"/>
               <a:t>Mode of access:  read, write, execute</a:t>
             </a:r>
           </a:p>
@@ -41673,7 +41744,7 @@
               </a:tabLst>
             </a:pPr>
             <a:r>
-              <a:rPr lang="en-US" altLang="en-US"/>
+              <a:rPr lang="en-US" altLang="en-US" dirty="0"/>
               <a:t>Three classes of users on Unix / Linux</a:t>
             </a:r>
           </a:p>
@@ -41695,15 +41766,15 @@
               </a:tabLst>
             </a:pPr>
             <a:r>
-              <a:rPr lang="en-US" altLang="en-US" sz="1600"/>
+              <a:rPr lang="en-US" altLang="en-US" sz="1600" dirty="0"/>
               <a:t>	</a:t>
             </a:r>
             <a:r>
-              <a:rPr lang="en-US" altLang="en-US" sz="800"/>
+              <a:rPr lang="en-US" altLang="en-US" sz="800" dirty="0"/>
               <a:t>	</a:t>
             </a:r>
             <a:r>
-              <a:rPr lang="en-US" altLang="en-US" sz="1600"/>
+              <a:rPr lang="en-US" altLang="en-US" sz="1600" dirty="0"/>
               <a:t>			RWX</a:t>
             </a:r>
           </a:p>
@@ -41725,30 +41796,30 @@
               </a:tabLst>
             </a:pPr>
             <a:r>
-              <a:rPr lang="en-US" altLang="en-US" sz="1600"/>
+              <a:rPr lang="en-US" altLang="en-US" sz="1600" dirty="0"/>
               <a:t>		a) </a:t>
             </a:r>
             <a:r>
-              <a:rPr lang="en-US" altLang="en-US" sz="1600" b="1"/>
+              <a:rPr lang="en-US" altLang="en-US" sz="1600" b="1" dirty="0"/>
               <a:t>owner access</a:t>
             </a:r>
             <a:r>
-              <a:rPr lang="en-US" altLang="en-US" sz="1600"/>
+              <a:rPr lang="en-US" altLang="en-US" sz="1600" dirty="0"/>
               <a:t> 	7	</a:t>
             </a:r>
             <a:r>
-              <a:rPr lang="en-US" altLang="en-US" sz="1600">
+              <a:rPr lang="en-US" altLang="en-US" sz="1600" dirty="0">
                 <a:sym typeface="Symbol" panose="05050102010706020507" pitchFamily="18" charset="2"/>
               </a:rPr>
               <a:t>	1 1 1</a:t>
             </a:r>
             <a:br>
-              <a:rPr lang="en-US" altLang="en-US" sz="1600">
+              <a:rPr lang="en-US" altLang="en-US" sz="1600" dirty="0">
                 <a:sym typeface="Symbol" panose="05050102010706020507" pitchFamily="18" charset="2"/>
               </a:rPr>
             </a:br>
             <a:r>
-              <a:rPr lang="en-US" altLang="en-US" sz="1600">
+              <a:rPr lang="en-US" altLang="en-US" sz="1600" dirty="0">
                 <a:sym typeface="Symbol" panose="05050102010706020507" pitchFamily="18" charset="2"/>
               </a:rPr>
               <a:t>				RWX</a:t>
@@ -41772,19 +41843,19 @@
               </a:tabLst>
             </a:pPr>
             <a:r>
-              <a:rPr lang="en-US" altLang="en-US" sz="1600">
+              <a:rPr lang="en-US" altLang="en-US" sz="1600" dirty="0">
                 <a:sym typeface="Symbol" panose="05050102010706020507" pitchFamily="18" charset="2"/>
               </a:rPr>
               <a:t>		b) </a:t>
             </a:r>
             <a:r>
-              <a:rPr lang="en-US" altLang="en-US" sz="1600" b="1">
+              <a:rPr lang="en-US" altLang="en-US" sz="1600" b="1" dirty="0">
                 <a:sym typeface="Symbol" panose="05050102010706020507" pitchFamily="18" charset="2"/>
               </a:rPr>
               <a:t>group access</a:t>
             </a:r>
             <a:r>
-              <a:rPr lang="en-US" altLang="en-US" sz="1600">
+              <a:rPr lang="en-US" altLang="en-US" sz="1600" dirty="0">
                 <a:sym typeface="Symbol" panose="05050102010706020507" pitchFamily="18" charset="2"/>
               </a:rPr>
               <a:t> 	6	 	1 1 0</a:t>
@@ -41808,7 +41879,7 @@
               </a:tabLst>
             </a:pPr>
             <a:r>
-              <a:rPr lang="en-US" altLang="en-US" sz="1600">
+              <a:rPr lang="en-US" altLang="en-US" sz="1600" dirty="0">
                 <a:sym typeface="Symbol" panose="05050102010706020507" pitchFamily="18" charset="2"/>
               </a:rPr>
               <a:t>					RWX</a:t>
@@ -41832,19 +41903,19 @@
               </a:tabLst>
             </a:pPr>
             <a:r>
-              <a:rPr lang="en-US" altLang="en-US" sz="1600">
+              <a:rPr lang="en-US" altLang="en-US" sz="1600" dirty="0">
                 <a:sym typeface="Symbol" panose="05050102010706020507" pitchFamily="18" charset="2"/>
               </a:rPr>
               <a:t>		c) </a:t>
             </a:r>
             <a:r>
-              <a:rPr lang="en-US" altLang="en-US" sz="1600" b="1">
+              <a:rPr lang="en-US" altLang="en-US" sz="1600" b="1" dirty="0">
                 <a:sym typeface="Symbol" panose="05050102010706020507" pitchFamily="18" charset="2"/>
               </a:rPr>
-              <a:t>public access</a:t>
-            </a:r>
-            <a:r>
-              <a:rPr lang="en-US" altLang="en-US" sz="1600">
+              <a:t>other access</a:t>
+            </a:r>
+            <a:r>
+              <a:rPr lang="en-US" altLang="en-US" sz="1600" dirty="0">
                 <a:sym typeface="Symbol" panose="05050102010706020507" pitchFamily="18" charset="2"/>
               </a:rPr>
               <a:t>	1	 	0 0 1</a:t>
@@ -41863,7 +41934,7 @@
               </a:tabLst>
             </a:pPr>
             <a:r>
-              <a:rPr lang="en-US" altLang="en-US">
+              <a:rPr lang="en-US" altLang="en-US" dirty="0">
                 <a:sym typeface="Symbol" panose="05050102010706020507" pitchFamily="18" charset="2"/>
               </a:rPr>
               <a:t>Ask manager to create a group (unique name), say G, and add some users to the group.</a:t>
@@ -41882,19 +41953,19 @@
               </a:tabLst>
             </a:pPr>
             <a:r>
-              <a:rPr lang="en-US" altLang="en-US">
+              <a:rPr lang="en-US" altLang="en-US" dirty="0">
                 <a:sym typeface="Symbol" panose="05050102010706020507" pitchFamily="18" charset="2"/>
               </a:rPr>
               <a:t>For a particular file (say </a:t>
             </a:r>
             <a:r>
-              <a:rPr lang="en-US" altLang="en-US" i="1">
+              <a:rPr lang="en-US" altLang="en-US" i="1" dirty="0">
                 <a:sym typeface="Symbol" panose="05050102010706020507" pitchFamily="18" charset="2"/>
               </a:rPr>
               <a:t>game</a:t>
             </a:r>
             <a:r>
-              <a:rPr lang="en-US" altLang="en-US">
+              <a:rPr lang="en-US" altLang="en-US" dirty="0">
                 <a:sym typeface="Symbol" panose="05050102010706020507" pitchFamily="18" charset="2"/>
               </a:rPr>
               <a:t>) or subdirectory, define an appropriate access.</a:t>
@@ -43236,32 +43307,40 @@
               <a:buNone/>
             </a:pPr>
             <a:r>
-              <a:rPr kumimoji="1" lang="en-US" altLang="en-US">
+              <a:rPr kumimoji="1" lang="en-US" altLang="en-US" dirty="0">
                 <a:latin typeface="Arial" panose="020B0604020202020204" pitchFamily="34" charset="0"/>
                 <a:sym typeface="Symbol" panose="05050102010706020507" pitchFamily="18" charset="2"/>
               </a:rPr>
               <a:t>Attach a group to a file</a:t>
             </a:r>
             <a:br>
-              <a:rPr kumimoji="1" lang="en-US" altLang="en-US">
+              <a:rPr kumimoji="1" lang="en-US" altLang="en-US" dirty="0">
                 <a:latin typeface="Arial" panose="020B0604020202020204" pitchFamily="34" charset="0"/>
                 <a:sym typeface="Symbol" panose="05050102010706020507" pitchFamily="18" charset="2"/>
               </a:rPr>
             </a:br>
             <a:r>
-              <a:rPr kumimoji="1" lang="en-US" altLang="en-US">
+              <a:rPr kumimoji="1" lang="en-US" altLang="en-US" dirty="0">
                 <a:latin typeface="Arial" panose="020B0604020202020204" pitchFamily="34" charset="0"/>
                 <a:sym typeface="Symbol" panose="05050102010706020507" pitchFamily="18" charset="2"/>
               </a:rPr>
               <a:t>	         </a:t>
             </a:r>
             <a:r>
-              <a:rPr kumimoji="1" lang="en-US" altLang="en-US" b="1">
+              <a:rPr kumimoji="1" lang="en-US" altLang="en-US" b="1" dirty="0" err="1">
                 <a:latin typeface="Courier New" panose="02070309020205020404" pitchFamily="49" charset="0"/>
                 <a:cs typeface="Courier New" panose="02070309020205020404" pitchFamily="49" charset="0"/>
                 <a:sym typeface="Symbol" panose="05050102010706020507" pitchFamily="18" charset="2"/>
               </a:rPr>
-              <a:t>chgrp     G    game</a:t>
+              <a:t>chgrp</a:t>
+            </a:r>
+            <a:r>
+              <a:rPr kumimoji="1" lang="en-US" altLang="en-US" b="1" dirty="0">
+                <a:latin typeface="Courier New" panose="02070309020205020404" pitchFamily="49" charset="0"/>
+                <a:cs typeface="Courier New" panose="02070309020205020404" pitchFamily="49" charset="0"/>
+                <a:sym typeface="Symbol" panose="05050102010706020507" pitchFamily="18" charset="2"/>
+              </a:rPr>
+              <a:t>     G    game</a:t>
             </a:r>
           </a:p>
         </p:txBody>
@@ -43386,8 +43465,8 @@
           <a:p>
             <a:pPr eaLnBrk="1" hangingPunct="1"/>
             <a:r>
-              <a:rPr lang="en-US" altLang="en-US" sz="2800"/>
-              <a:t>Windows 7 Access-Control List Management</a:t>
+              <a:rPr lang="en-US" altLang="en-US" sz="2800" dirty="0"/>
+              <a:t>Windows Access-Control List Management</a:t>
             </a:r>
           </a:p>
         </p:txBody>
@@ -44769,7 +44848,7 @@
                 <a:effectLst/>
                 <a:latin typeface="Montserrat" pitchFamily="2" charset="77"/>
               </a:rPr>
-              <a:t>Boot block X</a:t>
+              <a:t>Boot block</a:t>
             </a:r>
           </a:p>
           <a:p>
@@ -44785,7 +44864,7 @@
                 <a:effectLst/>
                 <a:latin typeface="Montserrat" pitchFamily="2" charset="77"/>
               </a:rPr>
-              <a:t>Free space management X</a:t>
+              <a:t>Free space management</a:t>
             </a:r>
           </a:p>
         </p:txBody>

--- a/file_system/file_systems.pptx
+++ b/file_system/file_systems.pptx
@@ -3535,6 +3535,27 @@
               <a:t> boot programs from the EFI System Partition.</a:t>
             </a:r>
           </a:p>
+          <a:p>
+            <a:endParaRPr lang="en-US" dirty="0"/>
+          </a:p>
+          <a:p>
+            <a:r>
+              <a:rPr lang="en-US" sz="1200" b="0" u="none" strike="noStrike" kern="1200" dirty="0">
+                <a:solidFill>
+                  <a:schemeClr val="tx1"/>
+                </a:solidFill>
+                <a:effectLst/>
+                <a:latin typeface="Times New Roman" pitchFamily="18" charset="0"/>
+                <a:ea typeface="MS PGothic" pitchFamily="34" charset="-128"/>
+                <a:cs typeface="ＭＳ Ｐゴシック" charset="0"/>
+              </a:rPr>
+              <a:t>Firmware is </a:t>
+            </a:r>
+            <a:r>
+              <a:rPr lang="en-US" dirty="0"/>
+              <a:t>a specialized type of software permanently or semi-permanently embedded directly into hardware devices to provide low-level control and basic operating instructions</a:t>
+            </a:r>
+          </a:p>
         </p:txBody>
       </p:sp>
       <p:sp>
@@ -8286,6 +8307,54 @@
               <a:rPr lang="en-US" sz="1200" dirty="0"/>
               <a:t>+ (2048 * 2048 * 2048 * 8 /KB) = 64 terabytes</a:t>
             </a:r>
+          </a:p>
+          <a:p>
+            <a:pPr marL="0" marR="0" lvl="0" indent="0" algn="l" defTabSz="914400" rtl="0" eaLnBrk="0" fontAlgn="base" latinLnBrk="0" hangingPunct="0">
+              <a:lnSpc>
+                <a:spcPct val="100000"/>
+              </a:lnSpc>
+              <a:spcBef>
+                <a:spcPct val="30000"/>
+              </a:spcBef>
+              <a:spcAft>
+                <a:spcPct val="0"/>
+              </a:spcAft>
+              <a:buClrTx/>
+              <a:buSzTx/>
+              <a:buFontTx/>
+              <a:buNone/>
+              <a:tabLst/>
+              <a:defRPr/>
+            </a:pPr>
+            <a:endParaRPr lang="en-US" sz="1200" dirty="0"/>
+          </a:p>
+          <a:p>
+            <a:pPr marL="0" marR="0" lvl="0" indent="0" algn="l" defTabSz="914400" rtl="0" eaLnBrk="0" fontAlgn="base" latinLnBrk="0" hangingPunct="0">
+              <a:lnSpc>
+                <a:spcPct val="100000"/>
+              </a:lnSpc>
+              <a:spcBef>
+                <a:spcPct val="30000"/>
+              </a:spcBef>
+              <a:spcAft>
+                <a:spcPct val="0"/>
+              </a:spcAft>
+              <a:buClrTx/>
+              <a:buSzTx/>
+              <a:buFontTx/>
+              <a:buNone/>
+              <a:tabLst/>
+              <a:defRPr/>
+            </a:pPr>
+            <a:r>
+              <a:rPr lang="en-US" sz="1200" dirty="0"/>
+              <a:t>12 * 8 + (2000 * 8) + (2000^2 * 8) = (2000^3 * 8) = 8 * (2000^3 + 2000^2 + 2000 + 12) = 64 032 016 096 ~= </a:t>
+            </a:r>
+            <a:r>
+              <a:rPr lang="en-US" sz="1200"/>
+              <a:t>64 Terabytes</a:t>
+            </a:r>
+            <a:endParaRPr lang="en-US" sz="1200" dirty="0"/>
           </a:p>
         </p:txBody>
       </p:sp>
@@ -20138,14 +20207,14 @@
           </a:ln>
           <a:extLst>
             <a:ext uri="{909E8E84-426E-40dd-AFC4-6F175D3DCCD1}">
-              <a14:hiddenFill xmlns="" xmlns:a14="http://schemas.microsoft.com/office/drawing/2010/main">
+              <a14:hiddenFill xmlns:a14="http://schemas.microsoft.com/office/drawing/2010/main" xmlns="">
                 <a:solidFill>
                   <a:srgbClr val="FFFFFF"/>
                 </a:solidFill>
               </a14:hiddenFill>
             </a:ext>
             <a:ext uri="{91240B29-F687-4f45-9708-019B960494DF}">
-              <a14:hiddenLine xmlns="" xmlns:a14="http://schemas.microsoft.com/office/drawing/2010/main" w="9525">
+              <a14:hiddenLine xmlns:a14="http://schemas.microsoft.com/office/drawing/2010/main" xmlns="" w="9525">
                 <a:solidFill>
                   <a:srgbClr val="000000"/>
                 </a:solidFill>
